--- a/word-drafts/figures/Vision-Fig4-Exchange.pptx
+++ b/word-drafts/figures/Vision-Fig4-Exchange.pptx
@@ -7,7 +7,7 @@
   <p:sldIdLst>
     <p:sldId id="256" r:id="rId7"/>
   </p:sldIdLst>
-  <p:sldSz cx="4438650" cy="3581400" type="screen4x3"/>
+  <p:sldSz cx="4438650" cy="5105400" type="screen4x3"/>
   <p:notesSz cx="6858000" cy="9144000"/>
   <p:defaultTextStyle>
     <a:defPPr>
@@ -3150,7 +3150,7 @@
         <p:spPr>
           <a:xfrm>
             <a:off x="1152525" y="857250"/>
-            <a:ext cx="0" cy="2476500"/>
+            <a:ext cx="0" cy="4000500"/>
           </a:xfrm>
           <a:prstGeom prst="line">
             <a:avLst/>
@@ -3238,7 +3238,7 @@
         <p:spPr>
           <a:xfrm>
             <a:off x="3286125" y="857250"/>
-            <a:ext cx="0" cy="2476500"/>
+            <a:ext cx="0" cy="4000500"/>
           </a:xfrm>
           <a:prstGeom prst="line">
             <a:avLst/>
@@ -3606,7 +3606,7 @@
                   <a:srgbClr val="111111"/>
                 </a:solidFill>
               </a:rPr>
-              <a:t>Browse result -&gt; ProducedBy -&gt; Deployment -&gt; UsesModel</a:t>
+              <a:t>Read result.ModelUsed</a:t>
             </a:r>
           </a:p>
         </p:txBody>
@@ -3676,7 +3676,285 @@
                   <a:srgbClr val="111111"/>
                 </a:solidFill>
               </a:rPr>
-              <a:t>ModelType (Version, Digest)</a:t>
+              <a:t>ModelType NodeId that produced the result</a:t>
+            </a:r>
+          </a:p>
+        </p:txBody>
+      </p:sp>
+      <p:cxnSp>
+        <p:nvCxnSpPr>
+          <p:cNvPr id="18" name="Connector 17"/>
+          <p:cNvCxnSpPr/>
+          <p:nvPr/>
+        </p:nvCxnSpPr>
+        <p:spPr>
+          <a:xfrm>
+            <a:off x="1152525" y="3333750"/>
+            <a:ext cx="2133600" cy="0"/>
+          </a:xfrm>
+          <a:prstGeom prst="line">
+            <a:avLst/>
+          </a:prstGeom>
+          <a:ln w="12700">
+            <a:solidFill>
+              <a:srgbClr val="444444"/>
+            </a:solidFill>
+          </a:ln>
+        </p:spPr>
+        <p:style>
+          <a:lnRef idx="2">
+            <a:schemeClr val="accent1"/>
+          </a:lnRef>
+          <a:fillRef idx="0">
+            <a:schemeClr val="accent1"/>
+          </a:fillRef>
+          <a:effectRef idx="1">
+            <a:schemeClr val="accent1"/>
+          </a:effectRef>
+          <a:fontRef idx="minor">
+            <a:schemeClr val="tx1"/>
+          </a:fontRef>
+        </p:style>
+      </p:cxnSp>
+      <p:sp>
+        <p:nvSpPr>
+          <p:cNvPr id="19" name="TextBox 18"/>
+          <p:cNvSpPr txBox="1"/>
+          <p:nvPr/>
+        </p:nvSpPr>
+        <p:spPr>
+          <a:xfrm>
+            <a:off x="1152525" y="3162300"/>
+            <a:ext cx="2133600" cy="190500"/>
+          </a:xfrm>
+          <a:prstGeom prst="rect">
+            <a:avLst/>
+          </a:prstGeom>
+          <a:noFill/>
+        </p:spPr>
+        <p:txBody>
+          <a:bodyPr wrap="square">
+            <a:spAutoFit/>
+          </a:bodyPr>
+          <a:lstStyle/>
+          <a:p>
+            <a:pPr algn="ctr"/>
+            <a:r>
+              <a:rPr sz="800">
+                <a:solidFill>
+                  <a:srgbClr val="111111"/>
+                </a:solidFill>
+              </a:rPr>
+              <a:t>Read ModelType (Version, Digest)</a:t>
+            </a:r>
+          </a:p>
+        </p:txBody>
+      </p:sp>
+      <p:cxnSp>
+        <p:nvCxnSpPr>
+          <p:cNvPr id="20" name="Connector 19"/>
+          <p:cNvCxnSpPr/>
+          <p:nvPr/>
+        </p:nvCxnSpPr>
+        <p:spPr>
+          <a:xfrm flipH="1">
+            <a:off x="1152525" y="3714750"/>
+            <a:ext cx="2133600" cy="0"/>
+          </a:xfrm>
+          <a:prstGeom prst="line">
+            <a:avLst/>
+          </a:prstGeom>
+          <a:ln w="12700">
+            <a:solidFill>
+              <a:srgbClr val="444444"/>
+            </a:solidFill>
+            <a:prstDash val="dash"/>
+          </a:ln>
+        </p:spPr>
+        <p:style>
+          <a:lnRef idx="2">
+            <a:schemeClr val="accent1"/>
+          </a:lnRef>
+          <a:fillRef idx="0">
+            <a:schemeClr val="accent1"/>
+          </a:fillRef>
+          <a:effectRef idx="1">
+            <a:schemeClr val="accent1"/>
+          </a:effectRef>
+          <a:fontRef idx="minor">
+            <a:schemeClr val="tx1"/>
+          </a:fontRef>
+        </p:style>
+      </p:cxnSp>
+      <p:sp>
+        <p:nvSpPr>
+          <p:cNvPr id="21" name="TextBox 20"/>
+          <p:cNvSpPr txBox="1"/>
+          <p:nvPr/>
+        </p:nvSpPr>
+        <p:spPr>
+          <a:xfrm>
+            <a:off x="1152525" y="3543300"/>
+            <a:ext cx="2133600" cy="190500"/>
+          </a:xfrm>
+          <a:prstGeom prst="rect">
+            <a:avLst/>
+          </a:prstGeom>
+          <a:noFill/>
+        </p:spPr>
+        <p:txBody>
+          <a:bodyPr wrap="square">
+            <a:spAutoFit/>
+          </a:bodyPr>
+          <a:lstStyle/>
+          <a:p>
+            <a:pPr algn="ctr"/>
+            <a:r>
+              <a:rPr sz="800">
+                <a:solidFill>
+                  <a:srgbClr val="111111"/>
+                </a:solidFill>
+              </a:rPr>
+              <a:t>Historical model identity and integrity</a:t>
+            </a:r>
+          </a:p>
+        </p:txBody>
+      </p:sp>
+      <p:cxnSp>
+        <p:nvCxnSpPr>
+          <p:cNvPr id="22" name="Connector 21"/>
+          <p:cNvCxnSpPr/>
+          <p:nvPr/>
+        </p:nvCxnSpPr>
+        <p:spPr>
+          <a:xfrm>
+            <a:off x="1152525" y="4095750"/>
+            <a:ext cx="2133600" cy="0"/>
+          </a:xfrm>
+          <a:prstGeom prst="line">
+            <a:avLst/>
+          </a:prstGeom>
+          <a:ln w="12700">
+            <a:solidFill>
+              <a:srgbClr val="444444"/>
+            </a:solidFill>
+          </a:ln>
+        </p:spPr>
+        <p:style>
+          <a:lnRef idx="2">
+            <a:schemeClr val="accent1"/>
+          </a:lnRef>
+          <a:fillRef idx="0">
+            <a:schemeClr val="accent1"/>
+          </a:fillRef>
+          <a:effectRef idx="1">
+            <a:schemeClr val="accent1"/>
+          </a:effectRef>
+          <a:fontRef idx="minor">
+            <a:schemeClr val="tx1"/>
+          </a:fontRef>
+        </p:style>
+      </p:cxnSp>
+      <p:sp>
+        <p:nvSpPr>
+          <p:cNvPr id="23" name="TextBox 22"/>
+          <p:cNvSpPr txBox="1"/>
+          <p:nvPr/>
+        </p:nvSpPr>
+        <p:spPr>
+          <a:xfrm>
+            <a:off x="1152525" y="3924300"/>
+            <a:ext cx="2133600" cy="190500"/>
+          </a:xfrm>
+          <a:prstGeom prst="rect">
+            <a:avLst/>
+          </a:prstGeom>
+          <a:noFill/>
+        </p:spPr>
+        <p:txBody>
+          <a:bodyPr wrap="square">
+            <a:spAutoFit/>
+          </a:bodyPr>
+          <a:lstStyle/>
+          <a:p>
+            <a:pPr algn="ctr"/>
+            <a:r>
+              <a:rPr sz="800">
+                <a:solidFill>
+                  <a:srgbClr val="111111"/>
+                </a:solidFill>
+              </a:rPr>
+              <a:t>Browse pipeline.Deployment -&gt; UsesModel</a:t>
+            </a:r>
+          </a:p>
+        </p:txBody>
+      </p:sp>
+      <p:cxnSp>
+        <p:nvCxnSpPr>
+          <p:cNvPr id="24" name="Connector 23"/>
+          <p:cNvCxnSpPr/>
+          <p:nvPr/>
+        </p:nvCxnSpPr>
+        <p:spPr>
+          <a:xfrm flipH="1">
+            <a:off x="1152525" y="4476750"/>
+            <a:ext cx="2133600" cy="0"/>
+          </a:xfrm>
+          <a:prstGeom prst="line">
+            <a:avLst/>
+          </a:prstGeom>
+          <a:ln w="12700">
+            <a:solidFill>
+              <a:srgbClr val="444444"/>
+            </a:solidFill>
+            <a:prstDash val="dash"/>
+          </a:ln>
+        </p:spPr>
+        <p:style>
+          <a:lnRef idx="2">
+            <a:schemeClr val="accent1"/>
+          </a:lnRef>
+          <a:fillRef idx="0">
+            <a:schemeClr val="accent1"/>
+          </a:fillRef>
+          <a:effectRef idx="1">
+            <a:schemeClr val="accent1"/>
+          </a:effectRef>
+          <a:fontRef idx="minor">
+            <a:schemeClr val="tx1"/>
+          </a:fontRef>
+        </p:style>
+      </p:cxnSp>
+      <p:sp>
+        <p:nvSpPr>
+          <p:cNvPr id="25" name="TextBox 24"/>
+          <p:cNvSpPr txBox="1"/>
+          <p:nvPr/>
+        </p:nvSpPr>
+        <p:spPr>
+          <a:xfrm>
+            <a:off x="1152525" y="4305300"/>
+            <a:ext cx="2133600" cy="190500"/>
+          </a:xfrm>
+          <a:prstGeom prst="rect">
+            <a:avLst/>
+          </a:prstGeom>
+          <a:noFill/>
+        </p:spPr>
+        <p:txBody>
+          <a:bodyPr wrap="square">
+            <a:spAutoFit/>
+          </a:bodyPr>
+          <a:lstStyle/>
+          <a:p>
+            <a:pPr algn="ctr"/>
+            <a:r>
+              <a:rPr sz="800">
+                <a:solidFill>
+                  <a:srgbClr val="111111"/>
+                </a:solidFill>
+              </a:rPr>
+              <a:t>ModelType serving now</a:t>
             </a:r>
           </a:p>
         </p:txBody>
